--- a/pcds_update_after_discussion_22Jan.pptx
+++ b/pcds_update_after_discussion_22Jan.pptx
@@ -6404,12 +6404,12 @@
                         <a:buNone/>
                       </a:pPr>
                       <a:r>
-                        <a:rPr lang="en-US" sz="1800" b="0">
+                        <a:rPr lang="en-US" sz="1800" b="0" dirty="0">
                           <a:effectLst/>
                         </a:rPr>
                         <a:t>My historic active stations list (Thank the gods that I kept them all from 2009) shows ELK at  125.8132639W, 49.85804722N Elev. 270 m Network BC Hydro</a:t>
                       </a:r>
-                      <a:endParaRPr lang="en-CA" sz="1800" b="0">
+                      <a:endParaRPr lang="en-CA" sz="1800" b="0" dirty="0">
                         <a:effectLst/>
                         <a:latin typeface="Aptos" panose="020B0004020202020204" pitchFamily="34" charset="0"/>
                         <a:ea typeface="DengXian" panose="02010600030101010101" pitchFamily="2" charset="-122"/>
@@ -8919,12 +8919,12 @@
                         <a:buAutoNum type="arabicPeriod"/>
                       </a:pPr>
                       <a:r>
-                        <a:rPr lang="en-US" sz="1400" b="0">
+                        <a:rPr lang="en-US" sz="1400" b="0" dirty="0">
                           <a:effectLst/>
                         </a:rPr>
                         <a:t>Slide 5 - We want to get the metadata information of 452, 543, T035, 77. Then conducting concatenating;</a:t>
                       </a:r>
-                      <a:endParaRPr lang="en-CA" sz="1400" b="0">
+                      <a:endParaRPr lang="en-CA" sz="1400" b="0" dirty="0">
                         <a:effectLst/>
                         <a:latin typeface="Aptos" panose="020B0004020202020204" pitchFamily="34" charset="0"/>
                         <a:ea typeface="DengXian" panose="02010600030101010101" pitchFamily="2" charset="-122"/>
@@ -8943,13 +8943,25 @@
                         <a:buNone/>
                       </a:pPr>
                       <a:r>
-                        <a:rPr lang="en-US" sz="1400" b="0">
-                          <a:effectLst/>
-                        </a:rPr>
-                        <a:t>452 – Fraser Lake Endako Mines (_60), 1</a:t>
-                      </a:r>
-                      <a:r>
-                        <a:rPr lang="en-CA" sz="1400" b="0">
+                        <a:rPr lang="en-US" sz="1400" b="0" dirty="0">
+                          <a:effectLst/>
+                        </a:rPr>
+                        <a:t>452 – Fraser Lake </a:t>
+                      </a:r>
+                      <a:r>
+                        <a:rPr lang="en-US" sz="1400" b="0" dirty="0" err="1">
+                          <a:effectLst/>
+                        </a:rPr>
+                        <a:t>Endako</a:t>
+                      </a:r>
+                      <a:r>
+                        <a:rPr lang="en-US" sz="1400" b="0" dirty="0">
+                          <a:effectLst/>
+                        </a:rPr>
+                        <a:t> Mines (_60), 1</a:t>
+                      </a:r>
+                      <a:r>
+                        <a:rPr lang="en-CA" sz="1400" b="0" dirty="0">
                           <a:effectLst/>
                         </a:rPr>
                         <a:t>25.095833 W, 54.034444 N, Elev. 1005 m, Network BC-AIR</a:t>
@@ -8960,19 +8972,31 @@
                         <a:buNone/>
                       </a:pPr>
                       <a:r>
-                        <a:rPr lang="en-CA" sz="1400" b="0">
-                          <a:effectLst/>
-                        </a:rPr>
-                        <a:t>543 – Skookumchuk Farstad Way(_60) – just went through a hardware upgrade (July 2025).  Prior to that period, the data was not continuous.  My recommendation is to delete the data up to August 1</a:t>
-                      </a:r>
-                      <a:r>
-                        <a:rPr lang="en-CA" sz="1400" b="0" baseline="30000">
+                        <a:rPr lang="en-CA" sz="1400" b="0" dirty="0">
+                          <a:effectLst/>
+                        </a:rPr>
+                        <a:t>543 – </a:t>
+                      </a:r>
+                      <a:r>
+                        <a:rPr lang="en-CA" sz="1400" b="0" dirty="0" err="1">
+                          <a:effectLst/>
+                        </a:rPr>
+                        <a:t>Skookumchuk</a:t>
+                      </a:r>
+                      <a:r>
+                        <a:rPr lang="en-CA" sz="1400" b="0" dirty="0">
+                          <a:effectLst/>
+                        </a:rPr>
+                        <a:t> Farstad Way(_60) – just went through a hardware upgrade (July 2025).  Prior to that period, the data was not continuous.  My recommendation is to delete the data up to August 1</a:t>
+                      </a:r>
+                      <a:r>
+                        <a:rPr lang="en-CA" sz="1400" b="0" baseline="30000" dirty="0">
                           <a:effectLst/>
                         </a:rPr>
                         <a:t>st</a:t>
                       </a:r>
                       <a:r>
-                        <a:rPr lang="en-CA" sz="1400" b="0">
+                        <a:rPr lang="en-CA" sz="1400" b="0" dirty="0">
                           <a:effectLst/>
                         </a:rPr>
                         <a:t>, 2025.  Metadata: 115.755613 W, 49.905404 N, Elev. 746 m Network BC-AIR</a:t>
@@ -8983,7 +9007,7 @@
                         <a:buNone/>
                       </a:pPr>
                       <a:r>
-                        <a:rPr lang="en-CA" sz="1400" b="0">
+                        <a:rPr lang="en-CA" sz="1400" b="0" dirty="0">
                           <a:effectLst/>
                         </a:rPr>
                         <a:t>T035 – Horseshoe Bay -  Network is MVRD-AIR,  This is one of the stations where meteorological  data and air quality data were likely collected by separate loggers, and then – at some point in time, merged to one logger. Go with he information under PCIC station ID 12160 amalgamating any non-overlapping data in 2634. Metadata: 123.2766 W, 49.3686 N, Elev. 65 m</a:t>
@@ -8994,12 +9018,12 @@
                         <a:buNone/>
                       </a:pPr>
                       <a:r>
-                        <a:rPr lang="en-CA" sz="1400" b="0">
+                        <a:rPr lang="en-CA" sz="1400" b="0" dirty="0">
                           <a:effectLst/>
                         </a:rPr>
                         <a:t>77 – I don’t see the reference in the Change spreadsheet posted to Google Drive to this native ID. Nor in my active station list. </a:t>
                       </a:r>
-                      <a:endParaRPr lang="en-CA" sz="1400" b="0">
+                      <a:endParaRPr lang="en-CA" sz="1400" b="0" dirty="0">
                         <a:effectLst/>
                         <a:latin typeface="Aptos" panose="020B0004020202020204" pitchFamily="34" charset="0"/>
                         <a:ea typeface="DengXian" panose="02010600030101010101" pitchFamily="2" charset="-122"/>
@@ -10282,18 +10306,54 @@
                         <a:buAutoNum type="arabicPeriod"/>
                       </a:pPr>
                       <a:r>
-                        <a:rPr lang="en-US" sz="1600" b="0">
+                        <a:rPr lang="en-US" sz="1600" b="0" dirty="0">
                           <a:effectLst/>
                         </a:rPr>
                         <a:t>Slide 7 – M106010 -&gt; 80 - </a:t>
                       </a:r>
                       <a:r>
-                        <a:rPr lang="en-CA" sz="1600" b="0">
-                          <a:effectLst/>
-                        </a:rPr>
-                        <a:t>New station: 12170 (102), rather than 80. So update the new station native_id to 80? Or concatenate them into the new native id 80?? The native_id 80 has the same station_name in the table</a:t>
-                      </a:r>
-                      <a:endParaRPr lang="en-CA" sz="1600" b="0">
+                        <a:rPr lang="en-CA" sz="1600" b="0" dirty="0">
+                          <a:effectLst/>
+                        </a:rPr>
+                        <a:t>New station: 12170 (102), rather than 80. So update the new station </a:t>
+                      </a:r>
+                      <a:r>
+                        <a:rPr lang="en-CA" sz="1600" b="0" dirty="0" err="1">
+                          <a:effectLst/>
+                        </a:rPr>
+                        <a:t>native_id</a:t>
+                      </a:r>
+                      <a:r>
+                        <a:rPr lang="en-CA" sz="1600" b="0" dirty="0">
+                          <a:effectLst/>
+                        </a:rPr>
+                        <a:t> to 80? Or concatenate them into the new native id 80?? The </a:t>
+                      </a:r>
+                      <a:r>
+                        <a:rPr lang="en-CA" sz="1600" b="0" dirty="0" err="1">
+                          <a:effectLst/>
+                        </a:rPr>
+                        <a:t>native_id</a:t>
+                      </a:r>
+                      <a:r>
+                        <a:rPr lang="en-CA" sz="1600" b="0" dirty="0">
+                          <a:effectLst/>
+                        </a:rPr>
+                        <a:t> 80 has the same </a:t>
+                      </a:r>
+                      <a:r>
+                        <a:rPr lang="en-CA" sz="1600" b="0" dirty="0" err="1">
+                          <a:effectLst/>
+                        </a:rPr>
+                        <a:t>station_name</a:t>
+                      </a:r>
+                      <a:r>
+                        <a:rPr lang="en-CA" sz="1600" b="0" dirty="0">
+                          <a:effectLst/>
+                        </a:rPr>
+                        <a:t> in the table</a:t>
+                      </a:r>
+                      <a:endParaRPr lang="en-CA" sz="1600" b="0" dirty="0">
                         <a:effectLst/>
                         <a:latin typeface="Aptos" panose="020B0004020202020204" pitchFamily="34" charset="0"/>
                         <a:ea typeface="DengXian" panose="02010600030101010101" pitchFamily="2" charset="-122"/>
@@ -10312,18 +10372,18 @@
                         <a:buNone/>
                       </a:pPr>
                       <a:r>
-                        <a:rPr lang="en-US" sz="1600" b="0">
+                        <a:rPr lang="en-US" sz="1600" b="0" dirty="0">
                           <a:effectLst/>
                         </a:rPr>
                         <a:t>I think this again is a transition between logger types – 2 loggers -&gt; 1 logger -&gt; new technology each making a unique native ID.  My recommendation is to amalgamate all to Native ID 80 and go with the metadata reported in the SWOBML and in my spread sheet under station ID 12185. Metadata </a:t>
                       </a:r>
                       <a:r>
-                        <a:rPr lang="en-CA" sz="1600" b="0">
+                        <a:rPr lang="en-CA" sz="1600" b="0" dirty="0">
                           <a:effectLst/>
                         </a:rPr>
                         <a:t>128.639131 W, 54.066909 N, Elev. 94 m, Network BC-AIR</a:t>
                       </a:r>
-                      <a:endParaRPr lang="en-CA" sz="1600" b="0">
+                      <a:endParaRPr lang="en-CA" sz="1600" b="0" dirty="0">
                         <a:effectLst/>
                         <a:latin typeface="Aptos" panose="020B0004020202020204" pitchFamily="34" charset="0"/>
                         <a:ea typeface="DengXian" panose="02010600030101010101" pitchFamily="2" charset="-122"/>
@@ -10350,12 +10410,12 @@
                         <a:buAutoNum type="arabicPeriod"/>
                       </a:pPr>
                       <a:r>
-                        <a:rPr lang="en-CA" sz="1600" b="0">
+                        <a:rPr lang="en-CA" sz="1600" b="0" dirty="0">
                           <a:effectLst/>
                         </a:rPr>
                         <a:t>Slide 7 M109912 -&gt; 144 only new station native ID (144) provided, the new station ID is 12254</a:t>
                       </a:r>
-                      <a:endParaRPr lang="en-CA" sz="1600" b="0">
+                      <a:endParaRPr lang="en-CA" sz="1600" b="0" dirty="0">
                         <a:effectLst/>
                         <a:latin typeface="Aptos" panose="020B0004020202020204" pitchFamily="34" charset="0"/>
                         <a:ea typeface="DengXian" panose="02010600030101010101" pitchFamily="2" charset="-122"/>
